--- a/2026-08-24_to_2026-08-28_Documentation/Suricata_Project_Presentation.pptx
+++ b/2026-08-24_to_2026-08-28_Documentation/Suricata_Project_Presentation.pptx
@@ -4421,7 +4421,7 @@
               <a:buChar char="•"/>
             </a:pPr>
             <a:r>
-              <a:rPr lang="en-US" sz="1300" dirty="0">
+              <a:rPr lang="en-US" sz="1300" dirty="0" smtClean="0">
                 <a:solidFill>
                   <a:srgbClr val="5B6472"/>
                 </a:solidFill>
@@ -4429,18 +4429,8 @@
                 <a:ea typeface="Calibri" pitchFamily="34" charset="-122"/>
                 <a:cs typeface="Calibri" pitchFamily="34" charset="-120"/>
               </a:rPr>
-              <a:t>~67,948 Emerging Threats Open rules loaded</a:t>
-            </a:r>
-            <a:endParaRPr lang="en-US" sz="1300" dirty="0"/>
-          </a:p>
-          <a:p>
-            <a:pPr marL="177800" indent="-177800">
-              <a:spcAft>
-                <a:spcPts val="1000"/>
-              </a:spcAft>
-              <a:buSzPct val="100000"/>
-              <a:buChar char="•"/>
-            </a:pPr>
+              <a:t>Attack </a:t>
+            </a:r>
             <a:r>
               <a:rPr lang="en-US" sz="1300" dirty="0">
                 <a:solidFill>
@@ -4450,7 +4440,7 @@
                 <a:ea typeface="Calibri" pitchFamily="34" charset="-122"/>
                 <a:cs typeface="Calibri" pitchFamily="34" charset="-120"/>
               </a:rPr>
-              <a:t>Attack traffic generated and captured end-to-end (Nmap, Nikto, brute force, SQLi)</a:t>
+              <a:t>traffic generated and captured end-to-end (Nmap, Nikto, brute force, SQLi)</a:t>
             </a:r>
             <a:endParaRPr lang="en-US" sz="1300" dirty="0"/>
           </a:p>
@@ -5026,9 +5016,6 @@
           <a:bodyPr wrap="square" rtlCol="0" anchor="ctr"/>
           <a:lstStyle/>
           <a:p>
-            <a:pPr marL="0" indent="0">
-              <a:buNone/>
-            </a:pPr>
             <a:r>
               <a:rPr lang="en-US" sz="2500" b="1" dirty="0">
                 <a:solidFill>
@@ -5038,7 +5025,7 @@
                 <a:ea typeface="Cambria" pitchFamily="34" charset="-122"/>
                 <a:cs typeface="Cambria" pitchFamily="34" charset="-120"/>
               </a:rPr>
-              <a:t>67,948</a:t>
+              <a:t>137,759</a:t>
             </a:r>
             <a:endParaRPr lang="en-US" sz="2500" dirty="0"/>
           </a:p>
@@ -5069,7 +5056,7 @@
               <a:buNone/>
             </a:pPr>
             <a:r>
-              <a:rPr lang="en-US" sz="1250" dirty="0">
+              <a:rPr lang="en-US" sz="1250" dirty="0" smtClean="0">
                 <a:solidFill>
                   <a:srgbClr val="9AA4B2"/>
                 </a:solidFill>
@@ -5077,7 +5064,18 @@
                 <a:ea typeface="Calibri" pitchFamily="34" charset="-122"/>
                 <a:cs typeface="Calibri" pitchFamily="34" charset="-120"/>
               </a:rPr>
-              <a:t>rules loaded</a:t>
+              <a:t>Active rules </a:t>
+            </a:r>
+            <a:r>
+              <a:rPr lang="en-US" sz="1250" dirty="0">
+                <a:solidFill>
+                  <a:srgbClr val="9AA4B2"/>
+                </a:solidFill>
+                <a:latin typeface="Calibri" pitchFamily="34" charset="0"/>
+                <a:ea typeface="Calibri" pitchFamily="34" charset="-122"/>
+                <a:cs typeface="Calibri" pitchFamily="34" charset="-120"/>
+              </a:rPr>
+              <a:t>loaded</a:t>
             </a:r>
             <a:endParaRPr lang="en-US" sz="1250" dirty="0"/>
           </a:p>
@@ -7973,8 +7971,8 @@
         </p:nvSpPr>
         <p:spPr>
           <a:xfrm>
-            <a:off x="6903720" y="1737360"/>
-            <a:ext cx="4754880" cy="4434840"/>
+            <a:off x="6903720" y="1431713"/>
+            <a:ext cx="4754880" cy="4935219"/>
           </a:xfrm>
           <a:prstGeom prst="roundRect">
             <a:avLst>
@@ -8000,7 +7998,7 @@
         </p:nvSpPr>
         <p:spPr>
           <a:xfrm>
-            <a:off x="7223760" y="1965960"/>
+            <a:off x="7223760" y="1466428"/>
             <a:ext cx="4114800" cy="320040"/>
           </a:xfrm>
           <a:prstGeom prst="rect">
@@ -8039,8 +8037,8 @@
         </p:nvSpPr>
         <p:spPr>
           <a:xfrm>
-            <a:off x="7223760" y="2423160"/>
-            <a:ext cx="4160520" cy="3566160"/>
+            <a:off x="7223760" y="2168312"/>
+            <a:ext cx="3122507" cy="3749885"/>
           </a:xfrm>
           <a:prstGeom prst="rect">
             <a:avLst/>
@@ -8060,17 +8058,42 @@
               <a:buChar char="•"/>
             </a:pPr>
             <a:r>
-              <a:rPr lang="en-US" sz="1150" dirty="0">
-                <a:solidFill>
-                  <a:srgbClr val="9AA4B2"/>
-                </a:solidFill>
-                <a:latin typeface="Calibri" pitchFamily="34" charset="0"/>
-                <a:ea typeface="Calibri" pitchFamily="34" charset="-122"/>
-                <a:cs typeface="Calibri" pitchFamily="34" charset="-120"/>
-              </a:rPr>
-              <a:t>et/open — Emerging Threats Open</a:t>
-            </a:r>
-            <a:endParaRPr lang="en-US" sz="1150" dirty="0"/>
+              <a:rPr lang="en-US" sz="1200" b="1" dirty="0">
+                <a:solidFill>
+                  <a:schemeClr val="bg1"/>
+                </a:solidFill>
+              </a:rPr>
+              <a:t> </a:t>
+            </a:r>
+            <a:r>
+              <a:rPr lang="en-US" sz="1200" b="1" dirty="0" err="1" smtClean="0">
+                <a:solidFill>
+                  <a:schemeClr val="bg1"/>
+                </a:solidFill>
+              </a:rPr>
+              <a:t>aleksibovellan</a:t>
+            </a:r>
+            <a:r>
+              <a:rPr lang="en-US" sz="1200" b="1" dirty="0" smtClean="0">
+                <a:solidFill>
+                  <a:schemeClr val="bg1"/>
+                </a:solidFill>
+              </a:rPr>
+              <a:t>/</a:t>
+            </a:r>
+            <a:r>
+              <a:rPr lang="en-US" sz="1200" b="1" dirty="0" err="1" smtClean="0">
+                <a:solidFill>
+                  <a:schemeClr val="bg1"/>
+                </a:solidFill>
+              </a:rPr>
+              <a:t>nmap</a:t>
+            </a:r>
+            <a:endParaRPr lang="en-US" sz="1200" b="1" dirty="0">
+              <a:solidFill>
+                <a:schemeClr val="bg1"/>
+              </a:solidFill>
+            </a:endParaRPr>
           </a:p>
           <a:p>
             <a:pPr marL="342900" indent="-342900">
@@ -8081,17 +8104,34 @@
               <a:buChar char="•"/>
             </a:pPr>
             <a:r>
-              <a:rPr lang="en-US" sz="1150" dirty="0">
-                <a:solidFill>
-                  <a:srgbClr val="9AA4B2"/>
-                </a:solidFill>
-                <a:latin typeface="Calibri" pitchFamily="34" charset="0"/>
-                <a:ea typeface="Calibri" pitchFamily="34" charset="-122"/>
-                <a:cs typeface="Calibri" pitchFamily="34" charset="-120"/>
-              </a:rPr>
-              <a:t>abuse.ch — URLhaus, Feodo, SSL/JA3</a:t>
-            </a:r>
-            <a:endParaRPr lang="en-US" sz="1150" dirty="0"/>
+              <a:rPr lang="en-US" sz="1200" b="1" dirty="0">
+                <a:solidFill>
+                  <a:schemeClr val="bg1"/>
+                </a:solidFill>
+              </a:rPr>
+              <a:t>  </a:t>
+            </a:r>
+            <a:r>
+              <a:rPr lang="en-US" sz="1200" b="1" dirty="0" smtClean="0">
+                <a:solidFill>
+                  <a:schemeClr val="bg1"/>
+                </a:solidFill>
+              </a:rPr>
+              <a:t>abuse.ch/</a:t>
+            </a:r>
+            <a:r>
+              <a:rPr lang="en-US" sz="1200" b="1" dirty="0" err="1" smtClean="0">
+                <a:solidFill>
+                  <a:schemeClr val="bg1"/>
+                </a:solidFill>
+              </a:rPr>
+              <a:t>urlhaus</a:t>
+            </a:r>
+            <a:endParaRPr lang="en-US" sz="1200" b="1" dirty="0">
+              <a:solidFill>
+                <a:schemeClr val="bg1"/>
+              </a:solidFill>
+            </a:endParaRPr>
           </a:p>
           <a:p>
             <a:pPr marL="342900" indent="-342900">
@@ -8102,17 +8142,34 @@
               <a:buChar char="•"/>
             </a:pPr>
             <a:r>
-              <a:rPr lang="en-US" sz="1150" dirty="0">
-                <a:solidFill>
-                  <a:srgbClr val="9AA4B2"/>
-                </a:solidFill>
-                <a:latin typeface="Calibri" pitchFamily="34" charset="0"/>
-                <a:ea typeface="Calibri" pitchFamily="34" charset="-122"/>
-                <a:cs typeface="Calibri" pitchFamily="34" charset="-120"/>
-              </a:rPr>
-              <a:t>ptrules/open — Positive Technologies</a:t>
-            </a:r>
-            <a:endParaRPr lang="en-US" sz="1150" dirty="0"/>
+              <a:rPr lang="en-US" sz="1200" b="1" dirty="0">
+                <a:solidFill>
+                  <a:schemeClr val="bg1"/>
+                </a:solidFill>
+              </a:rPr>
+              <a:t>  </a:t>
+            </a:r>
+            <a:r>
+              <a:rPr lang="en-US" sz="1200" b="1" dirty="0" smtClean="0">
+                <a:solidFill>
+                  <a:schemeClr val="bg1"/>
+                </a:solidFill>
+              </a:rPr>
+              <a:t>abuse.ch/</a:t>
+            </a:r>
+            <a:r>
+              <a:rPr lang="en-US" sz="1200" b="1" dirty="0" err="1" smtClean="0">
+                <a:solidFill>
+                  <a:schemeClr val="bg1"/>
+                </a:solidFill>
+              </a:rPr>
+              <a:t>feodotracker</a:t>
+            </a:r>
+            <a:endParaRPr lang="en-US" sz="1200" b="1" dirty="0">
+              <a:solidFill>
+                <a:schemeClr val="bg1"/>
+              </a:solidFill>
+            </a:endParaRPr>
           </a:p>
           <a:p>
             <a:pPr marL="342900" indent="-342900">
@@ -8123,17 +8180,34 @@
               <a:buChar char="•"/>
             </a:pPr>
             <a:r>
-              <a:rPr lang="en-US" sz="1150" dirty="0">
-                <a:solidFill>
-                  <a:srgbClr val="9AA4B2"/>
-                </a:solidFill>
-                <a:latin typeface="Calibri" pitchFamily="34" charset="0"/>
-                <a:ea typeface="Calibri" pitchFamily="34" charset="-122"/>
-                <a:cs typeface="Calibri" pitchFamily="34" charset="-120"/>
-              </a:rPr>
-              <a:t>oisf/trafficid — protocol classification</a:t>
-            </a:r>
-            <a:endParaRPr lang="en-US" sz="1150" dirty="0"/>
+              <a:rPr lang="en-US" sz="1200" b="1" dirty="0">
+                <a:solidFill>
+                  <a:schemeClr val="bg1"/>
+                </a:solidFill>
+              </a:rPr>
+              <a:t>  </a:t>
+            </a:r>
+            <a:r>
+              <a:rPr lang="en-US" sz="1200" b="1" dirty="0" err="1" smtClean="0">
+                <a:solidFill>
+                  <a:schemeClr val="bg1"/>
+                </a:solidFill>
+              </a:rPr>
+              <a:t>stamus</a:t>
+            </a:r>
+            <a:r>
+              <a:rPr lang="en-US" sz="1200" b="1" dirty="0" smtClean="0">
+                <a:solidFill>
+                  <a:schemeClr val="bg1"/>
+                </a:solidFill>
+              </a:rPr>
+              <a:t>/lateral</a:t>
+            </a:r>
+            <a:endParaRPr lang="en-US" sz="1200" b="1" dirty="0">
+              <a:solidFill>
+                <a:schemeClr val="bg1"/>
+              </a:solidFill>
+            </a:endParaRPr>
           </a:p>
           <a:p>
             <a:pPr marL="342900" indent="-342900">
@@ -8144,17 +8218,34 @@
               <a:buChar char="•"/>
             </a:pPr>
             <a:r>
-              <a:rPr lang="en-US" sz="1150" dirty="0">
-                <a:solidFill>
-                  <a:srgbClr val="9AA4B2"/>
-                </a:solidFill>
-                <a:latin typeface="Calibri" pitchFamily="34" charset="0"/>
-                <a:ea typeface="Calibri" pitchFamily="34" charset="-122"/>
-                <a:cs typeface="Calibri" pitchFamily="34" charset="-120"/>
-              </a:rPr>
-              <a:t>stamus/lateral — lateral movement</a:t>
-            </a:r>
-            <a:endParaRPr lang="en-US" sz="1150" dirty="0"/>
+              <a:rPr lang="en-US" sz="1200" b="1" dirty="0">
+                <a:solidFill>
+                  <a:schemeClr val="bg1"/>
+                </a:solidFill>
+              </a:rPr>
+              <a:t>  </a:t>
+            </a:r>
+            <a:r>
+              <a:rPr lang="en-US" sz="1200" b="1" dirty="0" err="1" smtClean="0">
+                <a:solidFill>
+                  <a:schemeClr val="bg1"/>
+                </a:solidFill>
+              </a:rPr>
+              <a:t>tgreen</a:t>
+            </a:r>
+            <a:r>
+              <a:rPr lang="en-US" sz="1200" b="1" dirty="0" smtClean="0">
+                <a:solidFill>
+                  <a:schemeClr val="bg1"/>
+                </a:solidFill>
+              </a:rPr>
+              <a:t>/hunting</a:t>
+            </a:r>
+            <a:endParaRPr lang="en-US" sz="1200" b="1" dirty="0">
+              <a:solidFill>
+                <a:schemeClr val="bg1"/>
+              </a:solidFill>
+            </a:endParaRPr>
           </a:p>
           <a:p>
             <a:pPr marL="342900" indent="-342900">
@@ -8165,17 +8256,42 @@
               <a:buChar char="•"/>
             </a:pPr>
             <a:r>
-              <a:rPr lang="en-US" sz="1150" dirty="0">
-                <a:solidFill>
-                  <a:srgbClr val="9AA4B2"/>
-                </a:solidFill>
-                <a:latin typeface="Calibri" pitchFamily="34" charset="0"/>
-                <a:ea typeface="Calibri" pitchFamily="34" charset="-122"/>
-                <a:cs typeface="Calibri" pitchFamily="34" charset="-120"/>
-              </a:rPr>
-              <a:t>aleksibovellan/nmap — recon detection</a:t>
-            </a:r>
-            <a:endParaRPr lang="en-US" sz="1150" dirty="0"/>
+              <a:rPr lang="en-US" sz="1200" b="1" dirty="0">
+                <a:solidFill>
+                  <a:schemeClr val="bg1"/>
+                </a:solidFill>
+              </a:rPr>
+              <a:t>  </a:t>
+            </a:r>
+            <a:r>
+              <a:rPr lang="en-US" sz="1200" b="1" dirty="0" err="1" smtClean="0">
+                <a:solidFill>
+                  <a:schemeClr val="bg1"/>
+                </a:solidFill>
+              </a:rPr>
+              <a:t>ipfire</a:t>
+            </a:r>
+            <a:r>
+              <a:rPr lang="en-US" sz="1200" b="1" dirty="0" smtClean="0">
+                <a:solidFill>
+                  <a:schemeClr val="bg1"/>
+                </a:solidFill>
+              </a:rPr>
+              <a:t>/</a:t>
+            </a:r>
+            <a:r>
+              <a:rPr lang="en-US" sz="1200" b="1" dirty="0" err="1" smtClean="0">
+                <a:solidFill>
+                  <a:schemeClr val="bg1"/>
+                </a:solidFill>
+              </a:rPr>
+              <a:t>dbl</a:t>
+            </a:r>
+            <a:endParaRPr lang="en-US" sz="1200" b="1" dirty="0">
+              <a:solidFill>
+                <a:schemeClr val="bg1"/>
+              </a:solidFill>
+            </a:endParaRPr>
           </a:p>
           <a:p>
             <a:pPr marL="342900" indent="-342900">
@@ -8186,17 +8302,26 @@
               <a:buChar char="•"/>
             </a:pPr>
             <a:r>
-              <a:rPr lang="en-US" sz="1150" dirty="0">
-                <a:solidFill>
-                  <a:srgbClr val="9AA4B2"/>
-                </a:solidFill>
-                <a:latin typeface="Calibri" pitchFamily="34" charset="0"/>
-                <a:ea typeface="Calibri" pitchFamily="34" charset="-122"/>
-                <a:cs typeface="Calibri" pitchFamily="34" charset="-120"/>
-              </a:rPr>
-              <a:t>julioliraup, ipfire/dbl, pawpatrules</a:t>
-            </a:r>
-            <a:endParaRPr lang="en-US" sz="1150" dirty="0"/>
+              <a:rPr lang="en-US" sz="1200" b="1" dirty="0">
+                <a:solidFill>
+                  <a:schemeClr val="bg1"/>
+                </a:solidFill>
+              </a:rPr>
+              <a:t>  </a:t>
+            </a:r>
+            <a:r>
+              <a:rPr lang="en-US" sz="1200" b="1" dirty="0" err="1" smtClean="0">
+                <a:solidFill>
+                  <a:schemeClr val="bg1"/>
+                </a:solidFill>
+              </a:rPr>
+              <a:t>pawpatrules</a:t>
+            </a:r>
+            <a:endParaRPr lang="en-US" sz="1200" b="1" dirty="0">
+              <a:solidFill>
+                <a:schemeClr val="bg1"/>
+              </a:solidFill>
+            </a:endParaRPr>
           </a:p>
           <a:p>
             <a:pPr marL="342900" indent="-342900">
@@ -8207,17 +8332,300 @@
               <a:buChar char="•"/>
             </a:pPr>
             <a:r>
-              <a:rPr lang="en-US" sz="1150" dirty="0">
-                <a:solidFill>
-                  <a:srgbClr val="9AA4B2"/>
-                </a:solidFill>
-                <a:latin typeface="Calibri" pitchFamily="34" charset="0"/>
-                <a:ea typeface="Calibri" pitchFamily="34" charset="-122"/>
-                <a:cs typeface="Calibri" pitchFamily="34" charset="-120"/>
-              </a:rPr>
-              <a:t>tgreen/hunting, etnetera, hunters-ledger</a:t>
-            </a:r>
-            <a:endParaRPr lang="en-US" sz="1150" dirty="0"/>
+              <a:rPr lang="en-US" sz="1200" b="1" dirty="0">
+                <a:solidFill>
+                  <a:schemeClr val="bg1"/>
+                </a:solidFill>
+              </a:rPr>
+              <a:t>  </a:t>
+            </a:r>
+            <a:r>
+              <a:rPr lang="en-US" sz="1200" b="1" dirty="0" smtClean="0">
+                <a:solidFill>
+                  <a:schemeClr val="bg1"/>
+                </a:solidFill>
+              </a:rPr>
+              <a:t>et/open</a:t>
+            </a:r>
+            <a:endParaRPr lang="en-US" sz="1200" b="1" dirty="0">
+              <a:solidFill>
+                <a:schemeClr val="bg1"/>
+              </a:solidFill>
+            </a:endParaRPr>
+          </a:p>
+          <a:p>
+            <a:pPr marL="342900" indent="-342900">
+              <a:spcAft>
+                <a:spcPts val="900"/>
+              </a:spcAft>
+              <a:buSzPct val="100000"/>
+              <a:buChar char="•"/>
+            </a:pPr>
+            <a:r>
+              <a:rPr lang="en-US" sz="1200" b="1" dirty="0">
+                <a:solidFill>
+                  <a:schemeClr val="bg1"/>
+                </a:solidFill>
+              </a:rPr>
+              <a:t>  </a:t>
+            </a:r>
+            <a:r>
+              <a:rPr lang="en-US" sz="1200" b="1" dirty="0" err="1" smtClean="0">
+                <a:solidFill>
+                  <a:schemeClr val="bg1"/>
+                </a:solidFill>
+              </a:rPr>
+              <a:t>etnetera</a:t>
+            </a:r>
+            <a:r>
+              <a:rPr lang="en-US" sz="1200" b="1" dirty="0" smtClean="0">
+                <a:solidFill>
+                  <a:schemeClr val="bg1"/>
+                </a:solidFill>
+              </a:rPr>
+              <a:t>/aggressive</a:t>
+            </a:r>
+            <a:endParaRPr lang="en-US" sz="1200" b="1" dirty="0">
+              <a:solidFill>
+                <a:schemeClr val="bg1"/>
+              </a:solidFill>
+            </a:endParaRPr>
+          </a:p>
+          <a:p>
+            <a:pPr marL="342900" indent="-342900">
+              <a:spcAft>
+                <a:spcPts val="900"/>
+              </a:spcAft>
+              <a:buSzPct val="100000"/>
+              <a:buChar char="•"/>
+            </a:pPr>
+            <a:r>
+              <a:rPr lang="en-US" sz="1200" b="1" dirty="0">
+                <a:solidFill>
+                  <a:schemeClr val="bg1"/>
+                </a:solidFill>
+              </a:rPr>
+              <a:t>  </a:t>
+            </a:r>
+            <a:r>
+              <a:rPr lang="en-US" sz="1200" b="1" dirty="0" smtClean="0">
+                <a:solidFill>
+                  <a:schemeClr val="bg1"/>
+                </a:solidFill>
+              </a:rPr>
+              <a:t>abuse.ch/sslbl-ja3</a:t>
+            </a:r>
+            <a:endParaRPr lang="en-US" sz="1200" b="1" dirty="0">
+              <a:solidFill>
+                <a:schemeClr val="bg1"/>
+              </a:solidFill>
+            </a:endParaRPr>
+          </a:p>
+          <a:p>
+            <a:pPr marL="342900" indent="-342900">
+              <a:spcAft>
+                <a:spcPts val="900"/>
+              </a:spcAft>
+              <a:buSzPct val="100000"/>
+              <a:buChar char="•"/>
+            </a:pPr>
+            <a:r>
+              <a:rPr lang="en-US" sz="1200" b="1" dirty="0">
+                <a:solidFill>
+                  <a:schemeClr val="bg1"/>
+                </a:solidFill>
+              </a:rPr>
+              <a:t>  </a:t>
+            </a:r>
+            <a:r>
+              <a:rPr lang="en-US" sz="1200" b="1" dirty="0" smtClean="0">
+                <a:solidFill>
+                  <a:schemeClr val="bg1"/>
+                </a:solidFill>
+              </a:rPr>
+              <a:t>abuse.ch/</a:t>
+            </a:r>
+            <a:r>
+              <a:rPr lang="en-US" sz="1200" b="1" dirty="0" err="1" smtClean="0">
+                <a:solidFill>
+                  <a:schemeClr val="bg1"/>
+                </a:solidFill>
+              </a:rPr>
+              <a:t>sslbl</a:t>
+            </a:r>
+            <a:r>
+              <a:rPr lang="en-US" sz="1200" b="1" dirty="0" smtClean="0">
+                <a:solidFill>
+                  <a:schemeClr val="bg1"/>
+                </a:solidFill>
+              </a:rPr>
+              <a:t>-blacklist</a:t>
+            </a:r>
+            <a:endParaRPr lang="en-US" sz="1200" b="1" dirty="0">
+              <a:solidFill>
+                <a:schemeClr val="bg1"/>
+              </a:solidFill>
+            </a:endParaRPr>
+          </a:p>
+          <a:p>
+            <a:pPr marL="342900" indent="-342900">
+              <a:spcAft>
+                <a:spcPts val="900"/>
+              </a:spcAft>
+              <a:buSzPct val="100000"/>
+              <a:buChar char="•"/>
+            </a:pPr>
+            <a:r>
+              <a:rPr lang="en-US" sz="1200" b="1" dirty="0">
+                <a:solidFill>
+                  <a:schemeClr val="bg1"/>
+                </a:solidFill>
+              </a:rPr>
+              <a:t>  </a:t>
+            </a:r>
+            <a:r>
+              <a:rPr lang="en-US" sz="1200" b="1" dirty="0" err="1" smtClean="0">
+                <a:solidFill>
+                  <a:schemeClr val="bg1"/>
+                </a:solidFill>
+              </a:rPr>
+              <a:t>oisf</a:t>
+            </a:r>
+            <a:r>
+              <a:rPr lang="en-US" sz="1200" b="1" dirty="0" smtClean="0">
+                <a:solidFill>
+                  <a:schemeClr val="bg1"/>
+                </a:solidFill>
+              </a:rPr>
+              <a:t>/</a:t>
+            </a:r>
+            <a:r>
+              <a:rPr lang="en-US" sz="1200" b="1" dirty="0" err="1" smtClean="0">
+                <a:solidFill>
+                  <a:schemeClr val="bg1"/>
+                </a:solidFill>
+              </a:rPr>
+              <a:t>trafficid</a:t>
+            </a:r>
+            <a:endParaRPr lang="en-US" sz="1200" b="1" dirty="0">
+              <a:solidFill>
+                <a:schemeClr val="bg1"/>
+              </a:solidFill>
+            </a:endParaRPr>
+          </a:p>
+          <a:p>
+            <a:pPr marL="342900" indent="-342900">
+              <a:spcAft>
+                <a:spcPts val="900"/>
+              </a:spcAft>
+              <a:buSzPct val="100000"/>
+              <a:buChar char="•"/>
+            </a:pPr>
+            <a:r>
+              <a:rPr lang="en-US" sz="1200" b="1" dirty="0">
+                <a:solidFill>
+                  <a:schemeClr val="bg1"/>
+                </a:solidFill>
+              </a:rPr>
+              <a:t>  </a:t>
+            </a:r>
+            <a:r>
+              <a:rPr lang="en-US" sz="1200" b="1" dirty="0" err="1" smtClean="0">
+                <a:solidFill>
+                  <a:schemeClr val="bg1"/>
+                </a:solidFill>
+              </a:rPr>
+              <a:t>ptrules</a:t>
+            </a:r>
+            <a:r>
+              <a:rPr lang="en-US" sz="1200" b="1" dirty="0" smtClean="0">
+                <a:solidFill>
+                  <a:schemeClr val="bg1"/>
+                </a:solidFill>
+              </a:rPr>
+              <a:t>/open</a:t>
+            </a:r>
+            <a:endParaRPr lang="en-US" sz="1200" b="1" dirty="0">
+              <a:solidFill>
+                <a:schemeClr val="bg1"/>
+              </a:solidFill>
+            </a:endParaRPr>
+          </a:p>
+          <a:p>
+            <a:pPr marL="342900" indent="-342900">
+              <a:spcAft>
+                <a:spcPts val="900"/>
+              </a:spcAft>
+              <a:buSzPct val="100000"/>
+              <a:buChar char="•"/>
+            </a:pPr>
+            <a:r>
+              <a:rPr lang="en-US" sz="1200" b="1" dirty="0">
+                <a:solidFill>
+                  <a:schemeClr val="bg1"/>
+                </a:solidFill>
+              </a:rPr>
+              <a:t>  </a:t>
+            </a:r>
+            <a:r>
+              <a:rPr lang="en-US" sz="1200" b="1" dirty="0" smtClean="0">
+                <a:solidFill>
+                  <a:schemeClr val="bg1"/>
+                </a:solidFill>
+              </a:rPr>
+              <a:t>the-hunters-ledger/open</a:t>
+            </a:r>
+            <a:endParaRPr lang="en-US" sz="1200" b="1" dirty="0">
+              <a:solidFill>
+                <a:schemeClr val="bg1"/>
+              </a:solidFill>
+            </a:endParaRPr>
+          </a:p>
+          <a:p>
+            <a:pPr marL="342900" indent="-342900">
+              <a:spcAft>
+                <a:spcPts val="900"/>
+              </a:spcAft>
+              <a:buSzPct val="100000"/>
+              <a:buChar char="•"/>
+            </a:pPr>
+            <a:r>
+              <a:rPr lang="en-US" sz="1200" b="1" dirty="0">
+                <a:solidFill>
+                  <a:schemeClr val="bg1"/>
+                </a:solidFill>
+              </a:rPr>
+              <a:t>  </a:t>
+            </a:r>
+            <a:r>
+              <a:rPr lang="en-US" sz="1200" b="1" dirty="0" err="1" smtClean="0">
+                <a:solidFill>
+                  <a:schemeClr val="bg1"/>
+                </a:solidFill>
+              </a:rPr>
+              <a:t>julioliraup</a:t>
+            </a:r>
+            <a:r>
+              <a:rPr lang="en-US" sz="1200" b="1" dirty="0" smtClean="0">
+                <a:solidFill>
+                  <a:schemeClr val="bg1"/>
+                </a:solidFill>
+              </a:rPr>
+              <a:t>/</a:t>
+            </a:r>
+            <a:r>
+              <a:rPr lang="en-US" sz="1200" b="1" dirty="0" err="1" smtClean="0">
+                <a:solidFill>
+                  <a:schemeClr val="bg1"/>
+                </a:solidFill>
+              </a:rPr>
+              <a:t>antiphishing</a:t>
+            </a:r>
+            <a:endParaRPr lang="en-US" sz="1200" b="1" dirty="0">
+              <a:solidFill>
+                <a:schemeClr val="bg1"/>
+              </a:solidFill>
+            </a:endParaRPr>
           </a:p>
         </p:txBody>
       </p:sp>
